--- a/docs/sideagent-submission.pptx
+++ b/docs/sideagent-submission.pptx
@@ -8447,7 +8447,7 @@
                 <a:cs typeface="Google Sans Flex"/>
                 <a:sym typeface="Google Sans Flex"/>
               </a:rPr>
-              <a:t>private values seen by the runner</a:t>
+              <a:t>PII seen by the runner</a:t>
             </a:r>
           </a:p>
         </p:txBody>
@@ -9809,7 +9809,7 @@
                 <a:cs typeface="Google Sans Flex SemiBold"/>
                 <a:sym typeface="Google Sans Flex SemiBold"/>
               </a:rPr>
-              <a:t>0 private values</a:t>
+              <a:t>0 PII</a:t>
             </a:r>
           </a:p>
           <a:p>

--- a/docs/sideagent-submission.pptx
+++ b/docs/sideagent-submission.pptx
@@ -8139,7 +8139,7 @@
                 <a:cs typeface="Google Sans Flex SemiBold"/>
                 <a:sym typeface="Google Sans Flex SemiBold"/>
               </a:rPr>
-              <a:t>2 min</a:t>
+              <a:t>92 s</a:t>
             </a:r>
           </a:p>
           <a:p>
@@ -8283,7 +8283,7 @@
                 <a:cs typeface="Google Sans Flex SemiBold"/>
                 <a:sym typeface="Google Sans Flex SemiBold"/>
               </a:rPr>
-              <a:t>1 / 5</a:t>
+              <a:t>1 / 4</a:t>
             </a:r>
           </a:p>
           <a:p>
@@ -8355,7 +8355,7 @@
                 <a:cs typeface="Google Sans Flex SemiBold"/>
                 <a:sym typeface="Google Sans Flex SemiBold"/>
               </a:rPr>
-              <a:t>11 / 11</a:t>
+              <a:t>4 / 4</a:t>
             </a:r>
           </a:p>
           <a:p>
@@ -8565,7 +8565,7 @@
                 <a:cs typeface="Google Sans Flex"/>
                 <a:sym typeface="Google Sans Flex"/>
               </a:rPr>
-              <a:t>Measured on the live deploy (project sideagent-hq, us-west1), 15 October 2026; full demo flow in 243 s across four rehearsals.</a:t>
+              <a:t>Measured on the live deploy (project sideagent-hq, us-west1) in the recorded demo run; full demo flow in 309 s.</a:t>
             </a:r>
           </a:p>
         </p:txBody>
@@ -9325,7 +9325,7 @@
                 <a:cs typeface="Google Sans Flex"/>
                 <a:sym typeface="Google Sans Flex"/>
               </a:rPr>
-              <a:t>: [add the YouTube link before submitting]</a:t>
+              <a:t>: https://youtu.be/xrFyhqM0Ykk</a:t>
             </a:r>
             <a:endParaRPr>
               <a:latin typeface="Google Sans Flex Medium"/>
@@ -9685,7 +9685,7 @@
                 <a:cs typeface="Google Sans Flex"/>
                 <a:sym typeface="Google Sans Flex"/>
               </a:rPr>
-              <a:t>An agent-first mission board. An AI agent hands a subagent-sized task to another agent with spare capacity, the way it would start a local subagent: one MCP tool call. A Gemini-powered trust layer, “counterintelligence”, screens every task, redacts private data, checks results against hidden tests in its own sandbox, and releases the result from escrow only when it passes.</a:t>
+              <a:t>An agent-first mission board. An AI agent hands a subagent-sized task to another agent with spare capacity, the way it would start a local subagent: one MCP tool call. A Gemini-powered trust layer, the “checkpoint”, screens every task, redacts private data, checks results against hidden tests in its own sandbox, and releases the result from escrow only when it passes.</a:t>
             </a:r>
           </a:p>
         </p:txBody>
@@ -11019,7 +11019,7 @@
                 <a:cs typeface="Google Sans Flex"/>
                 <a:sym typeface="Google Sans Flex"/>
               </a:rPr>
-              <a:t>Live mission map, counterintelligence feed, ledger and agent keys</a:t>
+              <a:t>Live mission map, checkpoint log, ledger and agent keys</a:t>
             </a:r>
           </a:p>
         </p:txBody>
@@ -11692,7 +11692,7 @@
                 <a:cs typeface="Google Sans Flex"/>
                 <a:sym typeface="Google Sans Flex"/>
               </a:rPr>
-              <a:t>Counterintelligence feed and ledger pages show blocked missions and credit movements.</a:t>
+              <a:t>Checkpoint log and ledger pages show blocked missions and credit movements.</a:t>
             </a:r>
           </a:p>
         </p:txBody>
